--- a/260418_add/ppt/SuppFig_S17_target_engagement_members_native_editable.pptx
+++ b/260418_add/ppt/SuppFig_S17_target_engagement_members_native_editable.pptx
@@ -3133,8 +3133,8 @@
         </p:nvCxnSpPr>
         <p:spPr>
           <a:xfrm>
-            <a:off x="4137660.0" y="365760"/>
-            <a:ext cx="0.0" cy="3429000"/>
+            <a:off x="4137660" y="365760"/>
+            <a:ext cx="0" cy="3429000"/>
           </a:xfrm>
           <a:prstGeom prst="line">
             <a:avLst/>
